--- a/Presentation.pptx
+++ b/Presentation.pptx
@@ -240,7 +240,7 @@
             <a:fld id="{20DF8AF8-FDE2-410C-8D85-3FB48DA88970}" type="datetimeFigureOut">
               <a:rPr lang="ru-RU" smtClean="0"/>
               <a:pPr/>
-              <a:t>16.06.2026</a:t>
+              <a:t>17.06.2026</a:t>
             </a:fld>
             <a:endParaRPr lang="ru-RU"/>
           </a:p>
@@ -560,7 +560,7 @@
           <a:p>
             <a:fld id="{20DF8AF8-FDE2-410C-8D85-3FB48DA88970}" type="datetimeFigureOut">
               <a:rPr lang="ru-RU" smtClean="0"/>
-              <a:t>16.06.2026</a:t>
+              <a:t>17.06.2026</a:t>
             </a:fld>
             <a:endParaRPr lang="ru-RU"/>
           </a:p>
@@ -782,7 +782,7 @@
           <a:p>
             <a:fld id="{20DF8AF8-FDE2-410C-8D85-3FB48DA88970}" type="datetimeFigureOut">
               <a:rPr lang="ru-RU" smtClean="0"/>
-              <a:t>16.06.2026</a:t>
+              <a:t>17.06.2026</a:t>
             </a:fld>
             <a:endParaRPr lang="ru-RU"/>
           </a:p>
@@ -1071,7 +1071,7 @@
             <a:fld id="{20DF8AF8-FDE2-410C-8D85-3FB48DA88970}" type="datetimeFigureOut">
               <a:rPr lang="ru-RU" smtClean="0"/>
               <a:pPr/>
-              <a:t>16.06.2026</a:t>
+              <a:t>17.06.2026</a:t>
             </a:fld>
             <a:endParaRPr lang="ru-RU"/>
           </a:p>
@@ -1392,7 +1392,7 @@
           <a:p>
             <a:fld id="{20DF8AF8-FDE2-410C-8D85-3FB48DA88970}" type="datetimeFigureOut">
               <a:rPr lang="ru-RU" smtClean="0"/>
-              <a:t>16.06.2026</a:t>
+              <a:t>17.06.2026</a:t>
             </a:fld>
             <a:endParaRPr lang="ru-RU"/>
           </a:p>
@@ -1672,7 +1672,7 @@
           <a:p>
             <a:fld id="{20DF8AF8-FDE2-410C-8D85-3FB48DA88970}" type="datetimeFigureOut">
               <a:rPr lang="ru-RU" smtClean="0"/>
-              <a:t>16.06.2026</a:t>
+              <a:t>17.06.2026</a:t>
             </a:fld>
             <a:endParaRPr lang="ru-RU"/>
           </a:p>
@@ -2099,7 +2099,7 @@
           <a:p>
             <a:fld id="{20DF8AF8-FDE2-410C-8D85-3FB48DA88970}" type="datetimeFigureOut">
               <a:rPr lang="ru-RU" smtClean="0"/>
-              <a:t>16.06.2026</a:t>
+              <a:t>17.06.2026</a:t>
             </a:fld>
             <a:endParaRPr lang="ru-RU"/>
           </a:p>
@@ -2253,7 +2253,7 @@
           <a:p>
             <a:fld id="{20DF8AF8-FDE2-410C-8D85-3FB48DA88970}" type="datetimeFigureOut">
               <a:rPr lang="ru-RU" smtClean="0"/>
-              <a:t>16.06.2026</a:t>
+              <a:t>17.06.2026</a:t>
             </a:fld>
             <a:endParaRPr lang="ru-RU"/>
           </a:p>
@@ -2378,7 +2378,7 @@
           <a:p>
             <a:fld id="{20DF8AF8-FDE2-410C-8D85-3FB48DA88970}" type="datetimeFigureOut">
               <a:rPr lang="ru-RU" smtClean="0"/>
-              <a:t>16.06.2026</a:t>
+              <a:t>17.06.2026</a:t>
             </a:fld>
             <a:endParaRPr lang="ru-RU"/>
           </a:p>
@@ -2703,7 +2703,7 @@
           <a:p>
             <a:fld id="{20DF8AF8-FDE2-410C-8D85-3FB48DA88970}" type="datetimeFigureOut">
               <a:rPr lang="ru-RU" smtClean="0"/>
-              <a:t>16.06.2026</a:t>
+              <a:t>17.06.2026</a:t>
             </a:fld>
             <a:endParaRPr lang="ru-RU"/>
           </a:p>
@@ -3004,7 +3004,7 @@
           <a:p>
             <a:fld id="{20DF8AF8-FDE2-410C-8D85-3FB48DA88970}" type="datetimeFigureOut">
               <a:rPr lang="ru-RU" smtClean="0"/>
-              <a:t>16.06.2026</a:t>
+              <a:t>17.06.2026</a:t>
             </a:fld>
             <a:endParaRPr lang="ru-RU"/>
           </a:p>
@@ -3259,7 +3259,7 @@
           <a:p>
             <a:fld id="{20DF8AF8-FDE2-410C-8D85-3FB48DA88970}" type="datetimeFigureOut">
               <a:rPr lang="ru-RU" smtClean="0"/>
-              <a:t>16.06.2026</a:t>
+              <a:t>17.06.2026</a:t>
             </a:fld>
             <a:endParaRPr lang="ru-RU"/>
           </a:p>
@@ -3987,13 +3987,13 @@
   <p:clrMapOvr>
     <a:masterClrMapping/>
   </p:clrMapOvr>
-  <mc:AlternateContent xmlns:mc="http://schemas.openxmlformats.org/markup-compatibility/2006">
-    <mc:Choice xmlns:p14="http://schemas.microsoft.com/office/powerpoint/2010/main" Requires="p14">
+  <mc:AlternateContent xmlns:mc="http://schemas.openxmlformats.org/markup-compatibility/2006" xmlns:p14="http://schemas.microsoft.com/office/powerpoint/2010/main">
+    <mc:Choice Requires="p14">
       <p:transition spd="med" p14:dur="700">
         <p:fade/>
       </p:transition>
     </mc:Choice>
-    <mc:Fallback>
+    <mc:Fallback xmlns="">
       <p:transition spd="med">
         <p:fade/>
       </p:transition>
@@ -4093,13 +4093,13 @@
   <p:clrMapOvr>
     <a:masterClrMapping/>
   </p:clrMapOvr>
-  <mc:AlternateContent xmlns:mc="http://schemas.openxmlformats.org/markup-compatibility/2006">
-    <mc:Choice xmlns:p14="http://schemas.microsoft.com/office/powerpoint/2010/main" Requires="p14">
+  <mc:AlternateContent xmlns:mc="http://schemas.openxmlformats.org/markup-compatibility/2006" xmlns:p14="http://schemas.microsoft.com/office/powerpoint/2010/main">
+    <mc:Choice Requires="p14">
       <p:transition spd="med" p14:dur="700">
         <p:fade/>
       </p:transition>
     </mc:Choice>
-    <mc:Fallback>
+    <mc:Fallback xmlns="">
       <p:transition spd="med">
         <p:fade/>
       </p:transition>
@@ -4927,13 +4927,13 @@
   <p:clrMapOvr>
     <a:masterClrMapping/>
   </p:clrMapOvr>
-  <mc:AlternateContent xmlns:mc="http://schemas.openxmlformats.org/markup-compatibility/2006">
-    <mc:Choice xmlns:p14="http://schemas.microsoft.com/office/powerpoint/2010/main" Requires="p14">
+  <mc:AlternateContent xmlns:mc="http://schemas.openxmlformats.org/markup-compatibility/2006" xmlns:p14="http://schemas.microsoft.com/office/powerpoint/2010/main">
+    <mc:Choice Requires="p14">
       <p:transition spd="med" p14:dur="700">
         <p:fade/>
       </p:transition>
     </mc:Choice>
-    <mc:Fallback>
+    <mc:Fallback xmlns="">
       <p:transition spd="med">
         <p:fade/>
       </p:transition>
@@ -5300,13 +5300,13 @@
   <p:clrMapOvr>
     <a:masterClrMapping/>
   </p:clrMapOvr>
-  <mc:AlternateContent xmlns:mc="http://schemas.openxmlformats.org/markup-compatibility/2006">
-    <mc:Choice xmlns:p14="http://schemas.microsoft.com/office/powerpoint/2010/main" Requires="p14">
+  <mc:AlternateContent xmlns:mc="http://schemas.openxmlformats.org/markup-compatibility/2006" xmlns:p14="http://schemas.microsoft.com/office/powerpoint/2010/main">
+    <mc:Choice Requires="p14">
       <p:transition spd="med" p14:dur="700">
         <p:fade/>
       </p:transition>
     </mc:Choice>
-    <mc:Fallback>
+    <mc:Fallback xmlns="">
       <p:transition spd="med">
         <p:fade/>
       </p:transition>
@@ -5647,13 +5647,13 @@
   <p:clrMapOvr>
     <a:masterClrMapping/>
   </p:clrMapOvr>
-  <mc:AlternateContent xmlns:mc="http://schemas.openxmlformats.org/markup-compatibility/2006">
-    <mc:Choice xmlns:p14="http://schemas.microsoft.com/office/powerpoint/2010/main" Requires="p14">
+  <mc:AlternateContent xmlns:mc="http://schemas.openxmlformats.org/markup-compatibility/2006" xmlns:p14="http://schemas.microsoft.com/office/powerpoint/2010/main">
+    <mc:Choice Requires="p14">
       <p:transition spd="med" p14:dur="700">
         <p:fade/>
       </p:transition>
     </mc:Choice>
-    <mc:Fallback>
+    <mc:Fallback xmlns="">
       <p:transition spd="med">
         <p:fade/>
       </p:transition>
@@ -5751,13 +5751,13 @@
   <p:clrMapOvr>
     <a:masterClrMapping/>
   </p:clrMapOvr>
-  <mc:AlternateContent xmlns:mc="http://schemas.openxmlformats.org/markup-compatibility/2006">
-    <mc:Choice xmlns:p14="http://schemas.microsoft.com/office/powerpoint/2010/main" Requires="p14">
+  <mc:AlternateContent xmlns:mc="http://schemas.openxmlformats.org/markup-compatibility/2006" xmlns:p14="http://schemas.microsoft.com/office/powerpoint/2010/main">
+    <mc:Choice Requires="p14">
       <p:transition spd="med" p14:dur="700">
         <p:fade/>
       </p:transition>
     </mc:Choice>
-    <mc:Fallback>
+    <mc:Fallback xmlns="">
       <p:transition spd="med">
         <p:fade/>
       </p:transition>
@@ -5911,13 +5911,13 @@
   <p:clrMapOvr>
     <a:masterClrMapping/>
   </p:clrMapOvr>
-  <mc:AlternateContent xmlns:mc="http://schemas.openxmlformats.org/markup-compatibility/2006">
-    <mc:Choice xmlns:p14="http://schemas.microsoft.com/office/powerpoint/2010/main" Requires="p14">
+  <mc:AlternateContent xmlns:mc="http://schemas.openxmlformats.org/markup-compatibility/2006" xmlns:p14="http://schemas.microsoft.com/office/powerpoint/2010/main">
+    <mc:Choice Requires="p14">
       <p:transition spd="med" p14:dur="700">
         <p:fade/>
       </p:transition>
     </mc:Choice>
-    <mc:Fallback>
+    <mc:Fallback xmlns="">
       <p:transition spd="med">
         <p:fade/>
       </p:transition>
@@ -6053,7 +6053,31 @@
                 <a:effectLst/>
                 <a:latin typeface="Mona Sans VF"/>
               </a:rPr>
-              <a:t>T - содержит информацию об общем количестве проверенных строк, количестве ошибочных строк и уровне качества данных, который определяется следующим образом - 1-(кол-во проверенных строк)/(кол-во ошибочных). Получаем долю верных данных.</a:t>
+              <a:t>T - содержит информацию об общем количестве проверенных строк, количестве ошибочных строк и уровне качества данных, который определяется следующим образом - 1-(</a:t>
+            </a:r>
+            <a:r>
+              <a:rPr lang="ru-RU" b="0" i="0">
+                <a:solidFill>
+                  <a:schemeClr val="tx2">
+                    <a:lumMod val="75000"/>
+                  </a:schemeClr>
+                </a:solidFill>
+                <a:effectLst/>
+                <a:latin typeface="Mona Sans VF"/>
+              </a:rPr>
+              <a:t>кол-во ошибочных </a:t>
+            </a:r>
+            <a:r>
+              <a:rPr lang="ru-RU" b="0" i="0" dirty="0">
+                <a:solidFill>
+                  <a:schemeClr val="tx2">
+                    <a:lumMod val="75000"/>
+                  </a:schemeClr>
+                </a:solidFill>
+                <a:effectLst/>
+                <a:latin typeface="Mona Sans VF"/>
+              </a:rPr>
+              <a:t>строк)/(кол-во проверенных строк). Получаем долю верных данных.</a:t>
             </a:r>
           </a:p>
           <a:p>
@@ -6172,13 +6196,13 @@
   <p:clrMapOvr>
     <a:masterClrMapping/>
   </p:clrMapOvr>
-  <mc:AlternateContent xmlns:mc="http://schemas.openxmlformats.org/markup-compatibility/2006">
-    <mc:Choice xmlns:p14="http://schemas.microsoft.com/office/powerpoint/2010/main" Requires="p14">
+  <mc:AlternateContent xmlns:mc="http://schemas.openxmlformats.org/markup-compatibility/2006" xmlns:p14="http://schemas.microsoft.com/office/powerpoint/2010/main">
+    <mc:Choice Requires="p14">
       <p:transition spd="med" p14:dur="700">
         <p:fade/>
       </p:transition>
     </mc:Choice>
-    <mc:Fallback>
+    <mc:Fallback xmlns="">
       <p:transition spd="med">
         <p:fade/>
       </p:transition>
@@ -6305,13 +6329,13 @@
   <p:clrMapOvr>
     <a:masterClrMapping/>
   </p:clrMapOvr>
-  <mc:AlternateContent xmlns:mc="http://schemas.openxmlformats.org/markup-compatibility/2006">
-    <mc:Choice xmlns:p14="http://schemas.microsoft.com/office/powerpoint/2010/main" Requires="p14">
+  <mc:AlternateContent xmlns:mc="http://schemas.openxmlformats.org/markup-compatibility/2006" xmlns:p14="http://schemas.microsoft.com/office/powerpoint/2010/main">
+    <mc:Choice Requires="p14">
       <p:transition spd="med" p14:dur="700">
         <p:fade/>
       </p:transition>
     </mc:Choice>
-    <mc:Fallback>
+    <mc:Fallback xmlns="">
       <p:transition spd="med">
         <p:fade/>
       </p:transition>
